--- a/参考文档/HUD自动化测试台架规划_20250820.pptx
+++ b/参考文档/HUD自动化测试台架规划_20250820.pptx
@@ -5,16 +5,18 @@
     <p:sldMasterId id="2147483648" r:id="rId1"/>
   </p:sldMasterIdLst>
   <p:notesMasterIdLst>
-    <p:notesMasterId r:id="rId7"/>
+    <p:notesMasterId r:id="rId9"/>
   </p:notesMasterIdLst>
   <p:handoutMasterIdLst>
-    <p:handoutMasterId r:id="rId8"/>
+    <p:handoutMasterId r:id="rId10"/>
   </p:handoutMasterIdLst>
   <p:sldIdLst>
     <p:sldId id="454" r:id="rId3"/>
     <p:sldId id="942" r:id="rId4"/>
     <p:sldId id="941" r:id="rId5"/>
-    <p:sldId id="808" r:id="rId6"/>
+    <p:sldId id="946" r:id="rId6"/>
+    <p:sldId id="945" r:id="rId7"/>
+    <p:sldId id="808" r:id="rId8"/>
   </p:sldIdLst>
   <p:sldSz cx="9144000" cy="5143500" type="screen16x9"/>
   <p:notesSz cx="6858000" cy="9144000"/>
@@ -9028,6 +9030,546 @@
         <p:cNvGrpSpPr/>
         <p:nvPr/>
       </p:nvGrpSpPr>
+      <p:grpSpPr/>
+      <p:sp>
+        <p:nvSpPr>
+          <p:cNvPr id="88" name="标题 1"/>
+          <p:cNvSpPr txBox="1"/>
+          <p:nvPr/>
+        </p:nvSpPr>
+        <p:spPr bwMode="auto">
+          <a:xfrm>
+            <a:off x="1353185" y="2139950"/>
+            <a:ext cx="6437630" cy="1190625"/>
+          </a:xfrm>
+          <a:prstGeom prst="rect">
+            <a:avLst/>
+          </a:prstGeom>
+          <a:noFill/>
+          <a:ln w="9525">
+            <a:noFill/>
+            <a:miter lim="800000"/>
+          </a:ln>
+        </p:spPr>
+        <p:txBody>
+          <a:bodyPr vert="horz" wrap="square" lIns="91440" tIns="45720" rIns="91440" bIns="45720" numCol="1" anchor="ctr" anchorCtr="0" compatLnSpc="1">
+            <a:noAutofit/>
+          </a:bodyPr>
+          <a:lstStyle>
+            <a:defPPr>
+              <a:defRPr lang="zh-CN"/>
+            </a:defPPr>
+            <a:lvl1pPr fontAlgn="base">
+              <a:spcBef>
+                <a:spcPct val="0"/>
+              </a:spcBef>
+              <a:spcAft>
+                <a:spcPct val="0"/>
+              </a:spcAft>
+              <a:defRPr sz="2000" b="1">
+                <a:solidFill>
+                  <a:srgbClr val="214F7A"/>
+                </a:solidFill>
+                <a:latin typeface="微软雅黑" panose="020B0503020204020204" pitchFamily="34" charset="-122"/>
+                <a:ea typeface="微软雅黑" panose="020B0503020204020204" pitchFamily="34" charset="-122"/>
+                <a:cs typeface="+mj-cs"/>
+              </a:defRPr>
+            </a:lvl1pPr>
+            <a:lvl2pPr algn="ctr" fontAlgn="base">
+              <a:spcBef>
+                <a:spcPct val="0"/>
+              </a:spcBef>
+              <a:spcAft>
+                <a:spcPct val="0"/>
+              </a:spcAft>
+              <a:defRPr sz="4400">
+                <a:latin typeface="Calibri" panose="020F0502020204030204" pitchFamily="34" charset="0"/>
+                <a:ea typeface="宋体" panose="02010600030101010101" pitchFamily="2" charset="-122"/>
+              </a:defRPr>
+            </a:lvl2pPr>
+            <a:lvl3pPr algn="ctr" fontAlgn="base">
+              <a:spcBef>
+                <a:spcPct val="0"/>
+              </a:spcBef>
+              <a:spcAft>
+                <a:spcPct val="0"/>
+              </a:spcAft>
+              <a:defRPr sz="4400">
+                <a:latin typeface="Calibri" panose="020F0502020204030204" pitchFamily="34" charset="0"/>
+                <a:ea typeface="宋体" panose="02010600030101010101" pitchFamily="2" charset="-122"/>
+              </a:defRPr>
+            </a:lvl3pPr>
+            <a:lvl4pPr algn="ctr" fontAlgn="base">
+              <a:spcBef>
+                <a:spcPct val="0"/>
+              </a:spcBef>
+              <a:spcAft>
+                <a:spcPct val="0"/>
+              </a:spcAft>
+              <a:defRPr sz="4400">
+                <a:latin typeface="Calibri" panose="020F0502020204030204" pitchFamily="34" charset="0"/>
+                <a:ea typeface="宋体" panose="02010600030101010101" pitchFamily="2" charset="-122"/>
+              </a:defRPr>
+            </a:lvl4pPr>
+            <a:lvl5pPr algn="ctr" fontAlgn="base">
+              <a:spcBef>
+                <a:spcPct val="0"/>
+              </a:spcBef>
+              <a:spcAft>
+                <a:spcPct val="0"/>
+              </a:spcAft>
+              <a:defRPr sz="4400">
+                <a:latin typeface="Calibri" panose="020F0502020204030204" pitchFamily="34" charset="0"/>
+                <a:ea typeface="宋体" panose="02010600030101010101" pitchFamily="2" charset="-122"/>
+              </a:defRPr>
+            </a:lvl5pPr>
+            <a:lvl6pPr marL="457200" algn="ctr" fontAlgn="base">
+              <a:spcBef>
+                <a:spcPct val="0"/>
+              </a:spcBef>
+              <a:spcAft>
+                <a:spcPct val="0"/>
+              </a:spcAft>
+              <a:defRPr sz="4400">
+                <a:latin typeface="Calibri" panose="020F0502020204030204" pitchFamily="34" charset="0"/>
+                <a:ea typeface="宋体" panose="02010600030101010101" pitchFamily="2" charset="-122"/>
+              </a:defRPr>
+            </a:lvl6pPr>
+            <a:lvl7pPr marL="914400" algn="ctr" fontAlgn="base">
+              <a:spcBef>
+                <a:spcPct val="0"/>
+              </a:spcBef>
+              <a:spcAft>
+                <a:spcPct val="0"/>
+              </a:spcAft>
+              <a:defRPr sz="4400">
+                <a:latin typeface="Calibri" panose="020F0502020204030204" pitchFamily="34" charset="0"/>
+                <a:ea typeface="宋体" panose="02010600030101010101" pitchFamily="2" charset="-122"/>
+              </a:defRPr>
+            </a:lvl7pPr>
+            <a:lvl8pPr marL="1371600" algn="ctr" fontAlgn="base">
+              <a:spcBef>
+                <a:spcPct val="0"/>
+              </a:spcBef>
+              <a:spcAft>
+                <a:spcPct val="0"/>
+              </a:spcAft>
+              <a:defRPr sz="4400">
+                <a:latin typeface="Calibri" panose="020F0502020204030204" pitchFamily="34" charset="0"/>
+                <a:ea typeface="宋体" panose="02010600030101010101" pitchFamily="2" charset="-122"/>
+              </a:defRPr>
+            </a:lvl8pPr>
+            <a:lvl9pPr marL="1828800" algn="ctr" fontAlgn="base">
+              <a:spcBef>
+                <a:spcPct val="0"/>
+              </a:spcBef>
+              <a:spcAft>
+                <a:spcPct val="0"/>
+              </a:spcAft>
+              <a:defRPr sz="4400">
+                <a:latin typeface="Calibri" panose="020F0502020204030204" pitchFamily="34" charset="0"/>
+                <a:ea typeface="宋体" panose="02010600030101010101" pitchFamily="2" charset="-122"/>
+              </a:defRPr>
+            </a:lvl9pPr>
+          </a:lstStyle>
+          <a:p>
+            <a:pPr algn="ctr"/>
+            <a:r>
+              <a:rPr lang="zh-CN" sz="2400" dirty="0" smtClean="0">
+                <a:solidFill>
+                  <a:srgbClr val="C00000"/>
+                </a:solidFill>
+                <a:sym typeface="+mn-ea"/>
+              </a:rPr>
+              <a:t>版本更新</a:t>
+            </a:r>
+            <a:endParaRPr lang="zh-CN" sz="2400" dirty="0" smtClean="0">
+              <a:solidFill>
+                <a:srgbClr val="C00000"/>
+              </a:solidFill>
+              <a:sym typeface="+mn-ea"/>
+            </a:endParaRPr>
+          </a:p>
+          <a:p>
+            <a:pPr algn="ctr"/>
+            <a:r>
+              <a:rPr lang="en-US" altLang="zh-CN" sz="2400" dirty="0" smtClean="0">
+                <a:solidFill>
+                  <a:srgbClr val="C00000"/>
+                </a:solidFill>
+              </a:rPr>
+              <a:t>2025.9.4</a:t>
+            </a:r>
+            <a:endParaRPr lang="en-US" altLang="zh-CN" sz="2400" dirty="0" smtClean="0">
+              <a:solidFill>
+                <a:srgbClr val="C00000"/>
+              </a:solidFill>
+            </a:endParaRPr>
+          </a:p>
+        </p:txBody>
+      </p:sp>
+    </p:spTree>
+  </p:cSld>
+  <p:clrMapOvr>
+    <a:masterClrMapping/>
+  </p:clrMapOvr>
+</p:sld>
+</file>
+
+<file path=ppt/slides/slide5.xml><?xml version="1.0" encoding="utf-8"?>
+<p:sld xmlns:a="http://schemas.openxmlformats.org/drawingml/2006/main" xmlns:r="http://schemas.openxmlformats.org/officeDocument/2006/relationships" xmlns:p="http://schemas.openxmlformats.org/presentationml/2006/main">
+  <p:cSld>
+    <p:spTree>
+      <p:nvGrpSpPr>
+        <p:cNvPr id="1" name=""/>
+        <p:cNvGrpSpPr/>
+        <p:nvPr/>
+      </p:nvGrpSpPr>
+      <p:grpSpPr>
+        <a:xfrm>
+          <a:off x="0" y="0"/>
+          <a:ext cx="0" cy="0"/>
+          <a:chOff x="0" y="0"/>
+          <a:chExt cx="0" cy="0"/>
+        </a:xfrm>
+      </p:grpSpPr>
+      <p:sp>
+        <p:nvSpPr>
+          <p:cNvPr id="88" name="标题 1"/>
+          <p:cNvSpPr txBox="1"/>
+          <p:nvPr/>
+        </p:nvSpPr>
+        <p:spPr bwMode="auto">
+          <a:xfrm>
+            <a:off x="206943" y="194945"/>
+            <a:ext cx="3723640" cy="378460"/>
+          </a:xfrm>
+          <a:prstGeom prst="rect">
+            <a:avLst/>
+          </a:prstGeom>
+          <a:noFill/>
+          <a:ln w="9525">
+            <a:noFill/>
+            <a:miter lim="800000"/>
+          </a:ln>
+        </p:spPr>
+        <p:txBody>
+          <a:bodyPr vert="horz" wrap="square" lIns="91440" tIns="45720" rIns="91440" bIns="45720" numCol="1" anchor="ctr" anchorCtr="0" compatLnSpc="1">
+            <a:noAutofit/>
+          </a:bodyPr>
+          <a:lstStyle>
+            <a:defPPr>
+              <a:defRPr lang="zh-CN"/>
+            </a:defPPr>
+            <a:lvl1pPr fontAlgn="base">
+              <a:spcBef>
+                <a:spcPct val="0"/>
+              </a:spcBef>
+              <a:spcAft>
+                <a:spcPct val="0"/>
+              </a:spcAft>
+              <a:defRPr sz="2000" b="1">
+                <a:solidFill>
+                  <a:srgbClr val="214F7A"/>
+                </a:solidFill>
+                <a:latin typeface="微软雅黑" panose="020B0503020204020204" pitchFamily="34" charset="-122"/>
+                <a:ea typeface="微软雅黑" panose="020B0503020204020204" pitchFamily="34" charset="-122"/>
+                <a:cs typeface="+mj-cs"/>
+              </a:defRPr>
+            </a:lvl1pPr>
+            <a:lvl2pPr algn="ctr" fontAlgn="base">
+              <a:spcBef>
+                <a:spcPct val="0"/>
+              </a:spcBef>
+              <a:spcAft>
+                <a:spcPct val="0"/>
+              </a:spcAft>
+              <a:defRPr sz="4400">
+                <a:latin typeface="Calibri" panose="020F0502020204030204" pitchFamily="34" charset="0"/>
+                <a:ea typeface="宋体" panose="02010600030101010101" pitchFamily="2" charset="-122"/>
+              </a:defRPr>
+            </a:lvl2pPr>
+            <a:lvl3pPr algn="ctr" fontAlgn="base">
+              <a:spcBef>
+                <a:spcPct val="0"/>
+              </a:spcBef>
+              <a:spcAft>
+                <a:spcPct val="0"/>
+              </a:spcAft>
+              <a:defRPr sz="4400">
+                <a:latin typeface="Calibri" panose="020F0502020204030204" pitchFamily="34" charset="0"/>
+                <a:ea typeface="宋体" panose="02010600030101010101" pitchFamily="2" charset="-122"/>
+              </a:defRPr>
+            </a:lvl3pPr>
+            <a:lvl4pPr algn="ctr" fontAlgn="base">
+              <a:spcBef>
+                <a:spcPct val="0"/>
+              </a:spcBef>
+              <a:spcAft>
+                <a:spcPct val="0"/>
+              </a:spcAft>
+              <a:defRPr sz="4400">
+                <a:latin typeface="Calibri" panose="020F0502020204030204" pitchFamily="34" charset="0"/>
+                <a:ea typeface="宋体" panose="02010600030101010101" pitchFamily="2" charset="-122"/>
+              </a:defRPr>
+            </a:lvl4pPr>
+            <a:lvl5pPr algn="ctr" fontAlgn="base">
+              <a:spcBef>
+                <a:spcPct val="0"/>
+              </a:spcBef>
+              <a:spcAft>
+                <a:spcPct val="0"/>
+              </a:spcAft>
+              <a:defRPr sz="4400">
+                <a:latin typeface="Calibri" panose="020F0502020204030204" pitchFamily="34" charset="0"/>
+                <a:ea typeface="宋体" panose="02010600030101010101" pitchFamily="2" charset="-122"/>
+              </a:defRPr>
+            </a:lvl5pPr>
+            <a:lvl6pPr marL="457200" algn="ctr" fontAlgn="base">
+              <a:spcBef>
+                <a:spcPct val="0"/>
+              </a:spcBef>
+              <a:spcAft>
+                <a:spcPct val="0"/>
+              </a:spcAft>
+              <a:defRPr sz="4400">
+                <a:latin typeface="Calibri" panose="020F0502020204030204" pitchFamily="34" charset="0"/>
+                <a:ea typeface="宋体" panose="02010600030101010101" pitchFamily="2" charset="-122"/>
+              </a:defRPr>
+            </a:lvl6pPr>
+            <a:lvl7pPr marL="914400" algn="ctr" fontAlgn="base">
+              <a:spcBef>
+                <a:spcPct val="0"/>
+              </a:spcBef>
+              <a:spcAft>
+                <a:spcPct val="0"/>
+              </a:spcAft>
+              <a:defRPr sz="4400">
+                <a:latin typeface="Calibri" panose="020F0502020204030204" pitchFamily="34" charset="0"/>
+                <a:ea typeface="宋体" panose="02010600030101010101" pitchFamily="2" charset="-122"/>
+              </a:defRPr>
+            </a:lvl7pPr>
+            <a:lvl8pPr marL="1371600" algn="ctr" fontAlgn="base">
+              <a:spcBef>
+                <a:spcPct val="0"/>
+              </a:spcBef>
+              <a:spcAft>
+                <a:spcPct val="0"/>
+              </a:spcAft>
+              <a:defRPr sz="4400">
+                <a:latin typeface="Calibri" panose="020F0502020204030204" pitchFamily="34" charset="0"/>
+                <a:ea typeface="宋体" panose="02010600030101010101" pitchFamily="2" charset="-122"/>
+              </a:defRPr>
+            </a:lvl8pPr>
+            <a:lvl9pPr marL="1828800" algn="ctr" fontAlgn="base">
+              <a:spcBef>
+                <a:spcPct val="0"/>
+              </a:spcBef>
+              <a:spcAft>
+                <a:spcPct val="0"/>
+              </a:spcAft>
+              <a:defRPr sz="4400">
+                <a:latin typeface="Calibri" panose="020F0502020204030204" pitchFamily="34" charset="0"/>
+                <a:ea typeface="宋体" panose="02010600030101010101" pitchFamily="2" charset="-122"/>
+              </a:defRPr>
+            </a:lvl9pPr>
+          </a:lstStyle>
+          <a:p>
+            <a:r>
+              <a:rPr lang="en-US" altLang="zh-CN" sz="2400" dirty="0" smtClean="0">
+                <a:solidFill>
+                  <a:srgbClr val="C00000"/>
+                </a:solidFill>
+                <a:sym typeface="+mn-ea"/>
+              </a:rPr>
+              <a:t>HUD</a:t>
+            </a:r>
+            <a:r>
+              <a:rPr lang="zh-CN" altLang="en-US" sz="2400" dirty="0" smtClean="0">
+                <a:solidFill>
+                  <a:srgbClr val="C00000"/>
+                </a:solidFill>
+                <a:sym typeface="+mn-ea"/>
+              </a:rPr>
+              <a:t>规划中工作</a:t>
+            </a:r>
+            <a:endParaRPr lang="zh-CN" altLang="en-US" sz="2400" dirty="0" smtClean="0">
+              <a:solidFill>
+                <a:srgbClr val="C00000"/>
+              </a:solidFill>
+            </a:endParaRPr>
+          </a:p>
+        </p:txBody>
+      </p:sp>
+      <p:sp>
+        <p:nvSpPr>
+          <p:cNvPr id="3" name="文本框 2"/>
+          <p:cNvSpPr txBox="1"/>
+          <p:nvPr/>
+        </p:nvSpPr>
+        <p:spPr>
+          <a:xfrm>
+            <a:off x="207010" y="771525"/>
+            <a:ext cx="7098030" cy="337185"/>
+          </a:xfrm>
+          <a:prstGeom prst="rect">
+            <a:avLst/>
+          </a:prstGeom>
+          <a:noFill/>
+        </p:spPr>
+        <p:txBody>
+          <a:bodyPr wrap="square" rtlCol="0" anchor="t">
+            <a:spAutoFit/>
+          </a:bodyPr>
+          <a:p>
+            <a:r>
+              <a:rPr lang="zh-CN" sz="1600">
+                <a:latin typeface="Times New Roman" panose="02020603050405020304" charset="0"/>
+                <a:ea typeface="微软雅黑" panose="020B0503020204020204" pitchFamily="34" charset="-122"/>
+                <a:cs typeface="Times New Roman" panose="02020603050405020304" charset="0"/>
+                <a:sym typeface="+mn-ea"/>
+              </a:rPr>
+              <a:t>新版本台架取消摄像头，而是直接从板端获取视频流。因此无需考虑环境影响</a:t>
+            </a:r>
+            <a:endParaRPr lang="zh-CN" sz="1600">
+              <a:latin typeface="Times New Roman" panose="02020603050405020304" charset="0"/>
+              <a:ea typeface="微软雅黑" panose="020B0503020204020204" pitchFamily="34" charset="-122"/>
+              <a:cs typeface="Times New Roman" panose="02020603050405020304" charset="0"/>
+              <a:sym typeface="+mn-ea"/>
+            </a:endParaRPr>
+          </a:p>
+        </p:txBody>
+      </p:sp>
+      <p:pic>
+        <p:nvPicPr>
+          <p:cNvPr id="18" name="图片 17" descr="图片1"/>
+          <p:cNvPicPr>
+            <a:picLocks noChangeAspect="1"/>
+          </p:cNvPicPr>
+          <p:nvPr/>
+        </p:nvPicPr>
+        <p:blipFill>
+          <a:blip r:embed="rId1"/>
+          <a:stretch>
+            <a:fillRect/>
+          </a:stretch>
+        </p:blipFill>
+        <p:spPr>
+          <a:xfrm>
+            <a:off x="5218430" y="1663065"/>
+            <a:ext cx="3022600" cy="1435100"/>
+          </a:xfrm>
+          <a:prstGeom prst="rect">
+            <a:avLst/>
+          </a:prstGeom>
+        </p:spPr>
+      </p:pic>
+      <p:pic>
+        <p:nvPicPr>
+          <p:cNvPr id="40" name="图片 39" descr="图片2"/>
+          <p:cNvPicPr>
+            <a:picLocks noChangeAspect="1"/>
+          </p:cNvPicPr>
+          <p:nvPr/>
+        </p:nvPicPr>
+        <p:blipFill>
+          <a:blip r:embed="rId2"/>
+          <a:stretch>
+            <a:fillRect/>
+          </a:stretch>
+        </p:blipFill>
+        <p:spPr>
+          <a:xfrm>
+            <a:off x="613410" y="1492250"/>
+            <a:ext cx="4509135" cy="1958340"/>
+          </a:xfrm>
+          <a:prstGeom prst="rect">
+            <a:avLst/>
+          </a:prstGeom>
+        </p:spPr>
+      </p:pic>
+      <p:sp>
+        <p:nvSpPr>
+          <p:cNvPr id="7" name="文本框 6"/>
+          <p:cNvSpPr txBox="1"/>
+          <p:nvPr/>
+        </p:nvSpPr>
+        <p:spPr>
+          <a:xfrm>
+            <a:off x="738505" y="4155440"/>
+            <a:ext cx="7666990" cy="337185"/>
+          </a:xfrm>
+          <a:prstGeom prst="rect">
+            <a:avLst/>
+          </a:prstGeom>
+          <a:noFill/>
+        </p:spPr>
+        <p:txBody>
+          <a:bodyPr wrap="square" rtlCol="0" anchor="t">
+            <a:spAutoFit/>
+          </a:bodyPr>
+          <a:p>
+            <a:pPr algn="ctr"/>
+            <a:r>
+              <a:rPr lang="zh-CN" sz="1600">
+                <a:latin typeface="Times New Roman" panose="02020603050405020304" charset="0"/>
+                <a:ea typeface="微软雅黑" panose="020B0503020204020204" pitchFamily="34" charset="-122"/>
+                <a:cs typeface="Times New Roman" panose="02020603050405020304" charset="0"/>
+                <a:sym typeface="+mn-ea"/>
+              </a:rPr>
+              <a:t>新增内容：现在的测试用例都是人想出来的，那么如何实现测试用例</a:t>
+            </a:r>
+            <a:r>
+              <a:rPr lang="en-US" altLang="zh-CN" sz="1600">
+                <a:latin typeface="Times New Roman" panose="02020603050405020304" charset="0"/>
+                <a:ea typeface="微软雅黑" panose="020B0503020204020204" pitchFamily="34" charset="-122"/>
+                <a:cs typeface="Times New Roman" panose="02020603050405020304" charset="0"/>
+                <a:sym typeface="+mn-ea"/>
+              </a:rPr>
+              <a:t>AI</a:t>
+            </a:r>
+            <a:r>
+              <a:rPr lang="zh-CN" sz="1600">
+                <a:latin typeface="Times New Roman" panose="02020603050405020304" charset="0"/>
+                <a:ea typeface="微软雅黑" panose="020B0503020204020204" pitchFamily="34" charset="-122"/>
+                <a:cs typeface="Times New Roman" panose="02020603050405020304" charset="0"/>
+                <a:sym typeface="+mn-ea"/>
+              </a:rPr>
+              <a:t>自动编写？</a:t>
+            </a:r>
+            <a:endParaRPr lang="zh-CN" sz="1600">
+              <a:latin typeface="Times New Roman" panose="02020603050405020304" charset="0"/>
+              <a:ea typeface="微软雅黑" panose="020B0503020204020204" pitchFamily="34" charset="-122"/>
+              <a:cs typeface="Times New Roman" panose="02020603050405020304" charset="0"/>
+              <a:sym typeface="+mn-ea"/>
+            </a:endParaRPr>
+          </a:p>
+        </p:txBody>
+      </p:sp>
+    </p:spTree>
+  </p:cSld>
+  <p:clrMapOvr>
+    <a:masterClrMapping/>
+  </p:clrMapOvr>
+  <p:timing>
+    <p:tnLst>
+      <p:par>
+        <p:cTn id="1" dur="indefinite" restart="never" nodeType="tmRoot"/>
+      </p:par>
+    </p:tnLst>
+  </p:timing>
+</p:sld>
+</file>
+
+<file path=ppt/slides/slide6.xml><?xml version="1.0" encoding="utf-8"?>
+<p:sld xmlns:a="http://schemas.openxmlformats.org/drawingml/2006/main" xmlns:r="http://schemas.openxmlformats.org/officeDocument/2006/relationships" xmlns:p="http://schemas.openxmlformats.org/presentationml/2006/main">
+  <p:cSld>
+    <p:spTree>
+      <p:nvGrpSpPr>
+        <p:cNvPr id="1" name=""/>
+        <p:cNvGrpSpPr/>
+        <p:nvPr/>
+      </p:nvGrpSpPr>
       <p:grpSpPr>
         <a:xfrm>
           <a:off x="0" y="0"/>
